--- a/docs/Lessons/Lesson 13 - A Hit That Reacts/Lesson_13_Slides.pptx
+++ b/docs/Lessons/Lesson 13 - A Hit That Reacts/Lesson_13_Slides.pptx
@@ -143,6 +143,230 @@
           <a:chExt cx="0" cy="0"/>
         </a:xfrm>
       </p:grpSpPr>
+      <p:sp>
+        <p:nvSpPr>
+          <p:cNvPr id="2" name="Header Placeholder 1"/>
+          <p:cNvSpPr>
+            <a:spLocks noGrp="1"/>
+          </p:cNvSpPr>
+          <p:nvPr>
+            <p:ph type="hdr" sz="quarter"/>
+          </p:nvPr>
+        </p:nvSpPr>
+        <p:spPr>
+          <a:xfrm>
+            <a:off x="0" y="0"/>
+            <a:ext cx="2971800" cy="458788"/>
+          </a:xfrm>
+          <a:prstGeom prst="rect">
+            <a:avLst/>
+          </a:prstGeom>
+        </p:spPr>
+        <p:txBody>
+          <a:bodyPr vert="horz" lIns="91440" tIns="45720" rIns="91440" bIns="45720" rtlCol="0"/>
+          <a:lstStyle>
+            <a:lvl1pPr algn="l">
+              <a:defRPr sz="1200"/>
+            </a:lvl1pPr>
+          </a:lstStyle>
+          <a:p>
+            <a:endParaRPr lang="en-US"/>
+          </a:p>
+        </p:txBody>
+      </p:sp>
+      <p:sp>
+        <p:nvSpPr>
+          <p:cNvPr id="3" name="Date Placeholder 2"/>
+          <p:cNvSpPr>
+            <a:spLocks noGrp="1"/>
+          </p:cNvSpPr>
+          <p:nvPr>
+            <p:ph type="dt" idx="1"/>
+          </p:nvPr>
+        </p:nvSpPr>
+        <p:spPr>
+          <a:xfrm>
+            <a:off x="3884613" y="0"/>
+            <a:ext cx="2971800" cy="458788"/>
+          </a:xfrm>
+          <a:prstGeom prst="rect">
+            <a:avLst/>
+          </a:prstGeom>
+        </p:spPr>
+        <p:txBody>
+          <a:bodyPr vert="horz" lIns="91440" tIns="45720" rIns="91440" bIns="45720" rtlCol="0"/>
+          <a:lstStyle>
+            <a:lvl1pPr algn="r">
+              <a:defRPr sz="1200"/>
+            </a:lvl1pPr>
+          </a:lstStyle>
+          <a:p>
+            <a:fld id="{5282F153-3F37-0F45-9E97-73ACFA13230C}" type="datetimeFigureOut">
+              <a:rPr lang="en-US"/>
+              <a:t>7/23/19</a:t>
+            </a:fld>
+            <a:endParaRPr lang="en-US"/>
+          </a:p>
+        </p:txBody>
+      </p:sp>
+      <p:sp>
+        <p:nvSpPr>
+          <p:cNvPr id="4" name="Slide Image Placeholder 3"/>
+          <p:cNvSpPr>
+            <a:spLocks noGrp="1" noRot="1" noChangeAspect="1"/>
+          </p:cNvSpPr>
+          <p:nvPr>
+            <p:ph type="sldImg" idx="2"/>
+          </p:nvPr>
+        </p:nvSpPr>
+        <p:spPr>
+          <a:xfrm>
+            <a:off x="685800" y="1143000"/>
+            <a:ext cx="5486400" cy="3086100"/>
+          </a:xfrm>
+          <a:prstGeom prst="rect">
+            <a:avLst/>
+          </a:prstGeom>
+          <a:noFill/>
+          <a:ln w="12700">
+            <a:solidFill>
+              <a:prstClr val="black"/>
+            </a:solidFill>
+          </a:ln>
+        </p:spPr>
+        <p:txBody>
+          <a:bodyPr vert="horz" lIns="91440" tIns="45720" rIns="91440" bIns="45720" rtlCol="0" anchor="ctr"/>
+          <a:lstStyle/>
+          <a:p>
+            <a:endParaRPr lang="en-US"/>
+          </a:p>
+        </p:txBody>
+      </p:sp>
+      <p:sp>
+        <p:nvSpPr>
+          <p:cNvPr id="5" name="Notes Placeholder 4"/>
+          <p:cNvSpPr>
+            <a:spLocks noGrp="1"/>
+          </p:cNvSpPr>
+          <p:nvPr>
+            <p:ph type="body" sz="quarter" idx="3"/>
+          </p:nvPr>
+        </p:nvSpPr>
+        <p:spPr>
+          <a:xfrm>
+            <a:off x="685800" y="4400550"/>
+            <a:ext cx="5486400" cy="3600450"/>
+          </a:xfrm>
+          <a:prstGeom prst="rect">
+            <a:avLst/>
+          </a:prstGeom>
+        </p:spPr>
+        <p:txBody>
+          <a:bodyPr vert="horz" lIns="91440" tIns="45720" rIns="91440" bIns="45720" rtlCol="0"/>
+          <a:lstStyle/>
+          <a:p>
+            <a:pPr lvl="0"/>
+            <a:r>
+              <a:rPr lang="en-US"/>
+              <a:t>Click to edit Master text styles</a:t>
+            </a:r>
+          </a:p>
+          <a:p>
+            <a:pPr lvl="1"/>
+            <a:r>
+              <a:rPr lang="en-US"/>
+              <a:t>Second level</a:t>
+            </a:r>
+          </a:p>
+          <a:p>
+            <a:pPr lvl="2"/>
+            <a:r>
+              <a:rPr lang="en-US"/>
+              <a:t>Third level</a:t>
+            </a:r>
+          </a:p>
+          <a:p>
+            <a:pPr lvl="3"/>
+            <a:r>
+              <a:rPr lang="en-US"/>
+              <a:t>Fourth level</a:t>
+            </a:r>
+          </a:p>
+          <a:p>
+            <a:pPr lvl="4"/>
+            <a:r>
+              <a:rPr lang="en-US"/>
+              <a:t>Fifth level</a:t>
+            </a:r>
+          </a:p>
+        </p:txBody>
+      </p:sp>
+      <p:sp>
+        <p:nvSpPr>
+          <p:cNvPr id="6" name="Footer Placeholder 5"/>
+          <p:cNvSpPr>
+            <a:spLocks noGrp="1"/>
+          </p:cNvSpPr>
+          <p:nvPr>
+            <p:ph type="ftr" sz="quarter" idx="4"/>
+          </p:nvPr>
+        </p:nvSpPr>
+        <p:spPr>
+          <a:xfrm>
+            <a:off x="0" y="8685213"/>
+            <a:ext cx="2971800" cy="458787"/>
+          </a:xfrm>
+          <a:prstGeom prst="rect">
+            <a:avLst/>
+          </a:prstGeom>
+        </p:spPr>
+        <p:txBody>
+          <a:bodyPr vert="horz" lIns="91440" tIns="45720" rIns="91440" bIns="45720" rtlCol="0" anchor="b"/>
+          <a:lstStyle>
+            <a:lvl1pPr algn="l">
+              <a:defRPr sz="1200"/>
+            </a:lvl1pPr>
+          </a:lstStyle>
+          <a:p>
+            <a:endParaRPr lang="en-US"/>
+          </a:p>
+        </p:txBody>
+      </p:sp>
+      <p:sp>
+        <p:nvSpPr>
+          <p:cNvPr id="7" name="Slide Number Placeholder 6"/>
+          <p:cNvSpPr>
+            <a:spLocks noGrp="1"/>
+          </p:cNvSpPr>
+          <p:nvPr>
+            <p:ph type="sldNum" sz="quarter" idx="5"/>
+          </p:nvPr>
+        </p:nvSpPr>
+        <p:spPr>
+          <a:xfrm>
+            <a:off x="3884613" y="8685213"/>
+            <a:ext cx="2971800" cy="458787"/>
+          </a:xfrm>
+          <a:prstGeom prst="rect">
+            <a:avLst/>
+          </a:prstGeom>
+        </p:spPr>
+        <p:txBody>
+          <a:bodyPr vert="horz" lIns="91440" tIns="45720" rIns="91440" bIns="45720" rtlCol="0" anchor="b"/>
+          <a:lstStyle>
+            <a:lvl1pPr algn="r">
+              <a:defRPr sz="1200"/>
+            </a:lvl1pPr>
+          </a:lstStyle>
+          <a:p>
+            <a:fld id="{CE5E9CC1-C706-0F49-92D6-E571CC5EEA8F}" type="slidenum">
+              <a:rPr lang="en-US"/>
+              <a:t>‹#›</a:t>
+            </a:fld>
+            <a:endParaRPr lang="en-US"/>
+          </a:p>
+        </p:txBody>
+      </p:sp>
     </p:spTree>
     <p:extLst>
       <p:ext uri="{BB962C8B-B14F-4D97-AF65-F5344CB8AC3E}">
@@ -468,7 +692,7 @@
           <a:p>
             <a:r>
               <a:rPr lang="en-US" dirty="0"/>
-              <a:t/>
+              <a:t>"Now the easier half: the explosion effect. It spawns at the hit location and IMMEDIATELY forgets about everything else - it doesn't know your score, doesn't know your wave, doesn't even know which enemy made it. It just plays itself out and cleans itself up, on its own." "This should feel familiar - it's the exact same discipline your bullets have followed since Lesson 3, and your enemies since Lesson 5. Every object in this game is responsible for exactly one job, and cleans up after itself. Today's explosion is just the newest member of that club." [Timing checkpoint: wrap by 0:50]</a:t>
             </a:r>
             <a:endParaRPr lang="en-US" dirty="0"/>
           </a:p>
@@ -644,7 +868,7 @@
           <a:p>
             <a:r>
               <a:rPr lang="en-US" dirty="0"/>
-              <a:t/>
+              <a:t>"For lab today, open your own project from last week - not a new one. One new asset is provided: a small explosion image. Unreal folks, you're using your existing Cube/Sphere shapes instead; TIC-80 folks, you're drawing your own tiny explosion sprite." [Hand out engine-specific handouts] "Test a FULL round when you're done - shooting, a wave clear, even a loss - and confirm nothing about your SCORING changed, only the visuals. That's today's real Level 2 check." "Questions before we start lab? ... Let's make getting hit feel like something."</a:t>
             </a:r>
             <a:endParaRPr lang="en-US" dirty="0"/>
           </a:p>
@@ -1172,7 +1396,7 @@
           <a:p>
             <a:r>
               <a:rPr lang="en-US" dirty="0"/>
-              <a:t/>
+              <a:t>"Welcome back! Last week your game got its voice. This week, it gets a body - a hit is about to actually LOOK like a hit, not just sound like one." "Since Lesson 4, an enemy you shoot has just... vanished. Functional, but not satisfying. Today we fix that: a brief flash, then a small explosion, before it disappears." [Timing checkpoint: wrap by 0:15]</a:t>
             </a:r>
             <a:endParaRPr lang="en-US" dirty="0"/>
           </a:p>
@@ -1348,7 +1572,7 @@
           <a:p>
             <a:r>
               <a:rPr lang="en-US" dirty="0"/>
-              <a:t/>
+              <a:t>"Two things are happening today, and they're different kinds of things. First: the enemy itself briefly flashes - a reaction ON the thing that got hit. Second: a completely separate explosion effect appears at that spot and plays itself out - independent of the enemy entirely." "Here's the rule for today, and it's important: your score, your lives, your wave counter, your win and lose logic - none of that changes WHEN it happens. Only how the enemy's removal LOOKS is changing. If you find yourself moving scoring code around, stop and re-check the Handout." [Timing checkpoint: wrap by 0:15]</a:t>
             </a:r>
             <a:endParaRPr lang="en-US" dirty="0"/>
           </a:p>
@@ -1524,7 +1748,7 @@
           <a:p>
             <a:r>
               <a:rPr lang="en-US" dirty="0"/>
-              <a:t/>
+              <a:t>[Demo cue: switch to Scratch, open a project with Lesson 12's four sounds working] "Here's the actual challenge this week: to see a flash, the enemy has to stick around for a fraction of a second AFTER being hit, before it's actually removed. That means something in our code needs to pause - just for a moment - without freezing the whole game." "Scratch actually has the simplest answer of any engine in this class: a plain 'wait' block. Watch - right in the Enemy's touching-Bullet branch, after scoring and the sound, I set the color effect to flash it white, then just drop in 'wait 0.1 seconds', then move the existing win-check and delete-this-clone below that wait." [Build it live, demonstrate the flash-then-disappear on a hit] "Everything below that wait block just... happens a moment later. No special keyword needed - Scratch was built from the ground up to run every sprite's scripts side by side, so pausing one of them was never a hard problem to solve." "Godot and Unity get the same result with a bit more ceremony - GDScript's await keyword and C#'s Coroutines both pause a script mid-line, the same idea as Scratch's wait, just spelled with more setup. But GameMaker and TIC-80 CAN'T do this at all - their code can't pause mid-script, full stop. So they solve it differently: GameMaker sets an Alarm and finishes the job in a second event, a fraction of a second later. TIC-80 does the Lua version of the same trick with a countdown variable. Four engines, two genuinely different families of solution to the same problem - and that's worth understanding, not just copying." [Timing checkpoint: wrap by 0:40]</a:t>
             </a:r>
             <a:endParaRPr lang="en-US" dirty="0"/>
           </a:p>
@@ -2687,7 +2911,7 @@
       </p:sp>
       <p:sp>
         <p:nvSpPr>
-          <p:cNvPr id="11" name="Text 7"/>
+          <p:cNvPr id="12" name="Text 7"/>
           <p:cNvSpPr/>
           <p:nvPr/>
         </p:nvSpPr>
@@ -2726,7 +2950,7 @@
       </p:sp>
       <p:sp>
         <p:nvSpPr>
-          <p:cNvPr id="12" name="Text 8"/>
+          <p:cNvPr id="13" name="Text 8"/>
           <p:cNvSpPr/>
           <p:nvPr/>
         </p:nvSpPr>
@@ -2765,7 +2989,7 @@
       </p:sp>
       <p:sp>
         <p:nvSpPr>
-          <p:cNvPr id="13" name="Text 9"/>
+          <p:cNvPr id="14" name="Text 9"/>
           <p:cNvSpPr/>
           <p:nvPr/>
         </p:nvSpPr>
@@ -3829,7 +4053,7 @@
       </p:sp>
       <p:sp>
         <p:nvSpPr>
-          <p:cNvPr id="22" name="Text 18"/>
+          <p:cNvPr id="23" name="Text 18"/>
           <p:cNvSpPr/>
           <p:nvPr/>
         </p:nvSpPr>
@@ -3868,7 +4092,7 @@
       </p:sp>
       <p:sp>
         <p:nvSpPr>
-          <p:cNvPr id="23" name="Text 19"/>
+          <p:cNvPr id="24" name="Text 19"/>
           <p:cNvSpPr/>
           <p:nvPr/>
         </p:nvSpPr>
@@ -3907,7 +4131,7 @@
       </p:sp>
       <p:sp>
         <p:nvSpPr>
-          <p:cNvPr id="24" name="Text 20"/>
+          <p:cNvPr id="25" name="Text 20"/>
           <p:cNvSpPr/>
           <p:nvPr/>
         </p:nvSpPr>
@@ -5376,7 +5600,7 @@
                 <a:ea typeface="Calibri" pitchFamily="34" charset="-122"/>
                 <a:cs typeface="Calibri" pitchFamily="34" charset="-120"/>
               </a:rPr>
-              <a:t>Godot, for the live lecture demo</a:t>
+              <a:t>Scratch, for the live lecture demo</a:t>
             </a:r>
             <a:endParaRPr lang="en-US" sz="1250" dirty="0"/>
           </a:p>
@@ -7620,7 +7844,7 @@
       </p:sp>
       <p:sp>
         <p:nvSpPr>
-          <p:cNvPr id="16" name="Text 9"/>
+          <p:cNvPr id="17" name="Text 9"/>
           <p:cNvSpPr/>
           <p:nvPr/>
         </p:nvSpPr>
@@ -7659,7 +7883,7 @@
       </p:sp>
       <p:sp>
         <p:nvSpPr>
-          <p:cNvPr id="17" name="Text 10"/>
+          <p:cNvPr id="18" name="Text 10"/>
           <p:cNvSpPr/>
           <p:nvPr/>
         </p:nvSpPr>
@@ -7698,7 +7922,7 @@
       </p:sp>
       <p:sp>
         <p:nvSpPr>
-          <p:cNvPr id="18" name="Text 11"/>
+          <p:cNvPr id="19" name="Text 11"/>
           <p:cNvSpPr/>
           <p:nvPr/>
         </p:nvSpPr>
@@ -8391,7 +8615,7 @@
       </p:sp>
       <p:sp>
         <p:nvSpPr>
-          <p:cNvPr id="12" name="Text 8"/>
+          <p:cNvPr id="13" name="Text 8"/>
           <p:cNvSpPr/>
           <p:nvPr/>
         </p:nvSpPr>
@@ -8430,7 +8654,7 @@
       </p:sp>
       <p:sp>
         <p:nvSpPr>
-          <p:cNvPr id="13" name="Text 9"/>
+          <p:cNvPr id="14" name="Text 9"/>
           <p:cNvSpPr/>
           <p:nvPr/>
         </p:nvSpPr>
@@ -8469,7 +8693,7 @@
       </p:sp>
       <p:sp>
         <p:nvSpPr>
-          <p:cNvPr id="14" name="Text 10"/>
+          <p:cNvPr id="15" name="Text 10"/>
           <p:cNvSpPr/>
           <p:nvPr/>
         </p:nvSpPr>
@@ -9326,7 +9550,7 @@
       </p:sp>
       <p:sp>
         <p:nvSpPr>
-          <p:cNvPr id="16" name="Text 13"/>
+          <p:cNvPr id="17" name="Text 13"/>
           <p:cNvSpPr/>
           <p:nvPr/>
         </p:nvSpPr>
@@ -9365,7 +9589,7 @@
       </p:sp>
       <p:sp>
         <p:nvSpPr>
-          <p:cNvPr id="17" name="Text 14"/>
+          <p:cNvPr id="18" name="Text 14"/>
           <p:cNvSpPr/>
           <p:nvPr/>
         </p:nvSpPr>
@@ -9404,7 +9628,7 @@
       </p:sp>
       <p:sp>
         <p:nvSpPr>
-          <p:cNvPr id="18" name="Text 15"/>
+          <p:cNvPr id="19" name="Text 15"/>
           <p:cNvSpPr/>
           <p:nvPr/>
         </p:nvSpPr>
